--- a/Lectures/py_lec_8.pptx
+++ b/Lectures/py_lec_8.pptx
@@ -19544,7 +19544,7 @@
         <p:spPr>
           <a:xfrm>
             <a:off x="445195" y="237069"/>
-            <a:ext cx="8914465" cy="694146"/>
+            <a:ext cx="8549515" cy="694146"/>
           </a:xfrm>
           <a:prstGeom prst="rect">
             <a:avLst/>
@@ -23091,7 +23091,17 @@
                 <a:latin typeface="Courier New" panose="02070309020205020404" pitchFamily="49" charset="0"/>
                 <a:cs typeface="Courier New" panose="02070309020205020404" pitchFamily="49" charset="0"/>
               </a:rPr>
-              <a:t>f'{</a:t>
+              <a:t>f'</a:t>
+            </a:r>
+            <a:r>
+              <a:rPr lang="en-US" sz="1000" b="1" dirty="0">
+                <a:solidFill>
+                  <a:srgbClr val="000080"/>
+                </a:solidFill>
+                <a:latin typeface="Courier New" panose="02070309020205020404" pitchFamily="49" charset="0"/>
+                <a:cs typeface="Courier New" panose="02070309020205020404" pitchFamily="49" charset="0"/>
+              </a:rPr>
+              <a:t>{</a:t>
             </a:r>
             <a:r>
               <a:rPr lang="en-US" sz="1000" dirty="0">
@@ -23105,6 +23115,16 @@
               <a:t>login</a:t>
             </a:r>
             <a:r>
+              <a:rPr lang="en-US" sz="1000" b="1" dirty="0">
+                <a:solidFill>
+                  <a:srgbClr val="000080"/>
+                </a:solidFill>
+                <a:latin typeface="Courier New" panose="02070309020205020404" pitchFamily="49" charset="0"/>
+                <a:cs typeface="Courier New" panose="02070309020205020404" pitchFamily="49" charset="0"/>
+              </a:rPr>
+              <a:t>}</a:t>
+            </a:r>
+            <a:r>
               <a:rPr lang="en-US" sz="1000" dirty="0">
                 <a:solidFill>
                   <a:srgbClr val="808080"/>
@@ -23113,7 +23133,7 @@
                 <a:latin typeface="Courier New" panose="02070309020205020404" pitchFamily="49" charset="0"/>
                 <a:cs typeface="Courier New" panose="02070309020205020404" pitchFamily="49" charset="0"/>
               </a:rPr>
-              <a:t>}@mail.ru'</a:t>
+              <a:t>@mail.ru'</a:t>
             </a:r>
             <a:r>
               <a:rPr lang="en-US" sz="1000" dirty="0">

--- a/Lectures/py_lec_8.pptx
+++ b/Lectures/py_lec_8.pptx
@@ -38,36 +38,36 @@
   <p:notesSz cx="6858000" cy="9144000"/>
   <p:embeddedFontLst>
     <p:embeddedFont>
-      <p:font typeface="DM Sans" panose="020B0604020202020204" charset="0"/>
+      <p:font typeface="Viga" panose="020B0604020202020204" charset="0"/>
       <p:regular r:id="rId28"/>
-      <p:bold r:id="rId29"/>
-      <p:italic r:id="rId30"/>
-      <p:boldItalic r:id="rId31"/>
+    </p:embeddedFont>
+    <p:embeddedFont>
+      <p:font typeface="Calibri" panose="020F0502020204030204" pitchFamily="34" charset="0"/>
+      <p:regular r:id="rId29"/>
+      <p:bold r:id="rId30"/>
+      <p:italic r:id="rId31"/>
+      <p:boldItalic r:id="rId32"/>
+    </p:embeddedFont>
+    <p:embeddedFont>
+      <p:font typeface="proxima nova bold" panose="02000506030000020004" charset="0"/>
+      <p:bold r:id="rId33"/>
+    </p:embeddedFont>
+    <p:embeddedFont>
+      <p:font typeface="Verdana" panose="020B0604030504040204" pitchFamily="34" charset="0"/>
+      <p:regular r:id="rId34"/>
+      <p:bold r:id="rId35"/>
+      <p:italic r:id="rId36"/>
+      <p:boldItalic r:id="rId37"/>
     </p:embeddedFont>
     <p:embeddedFont>
       <p:font typeface="proxima nova rg" panose="02000506030000020004" charset="0"/>
-      <p:regular r:id="rId32"/>
-      <p:bold r:id="rId33"/>
-      <p:italic r:id="rId34"/>
-      <p:boldItalic r:id="rId35"/>
+      <p:regular r:id="rId38"/>
+      <p:bold r:id="rId39"/>
+      <p:italic r:id="rId40"/>
+      <p:boldItalic r:id="rId41"/>
     </p:embeddedFont>
     <p:embeddedFont>
-      <p:font typeface="proxima nova bold" panose="02000506030000020004" charset="0"/>
-      <p:bold r:id="rId36"/>
-    </p:embeddedFont>
-    <p:embeddedFont>
-      <p:font typeface="Calibri" panose="020F0502020204030204" pitchFamily="34" charset="0"/>
-      <p:regular r:id="rId37"/>
-      <p:bold r:id="rId38"/>
-      <p:italic r:id="rId39"/>
-      <p:boldItalic r:id="rId40"/>
-    </p:embeddedFont>
-    <p:embeddedFont>
-      <p:font typeface="Viga" panose="020B0604020202020204" charset="0"/>
-      <p:regular r:id="rId41"/>
-    </p:embeddedFont>
-    <p:embeddedFont>
-      <p:font typeface="Verdana" panose="020B0604030504040204" pitchFamily="34" charset="0"/>
+      <p:font typeface="DM Sans" panose="020B0604020202020204" charset="0"/>
       <p:regular r:id="rId42"/>
       <p:bold r:id="rId43"/>
       <p:italic r:id="rId44"/>
@@ -19941,7 +19941,7 @@
         <p:spPr>
           <a:xfrm>
             <a:off x="690954" y="2681400"/>
-            <a:ext cx="6081105" cy="954107"/>
+            <a:ext cx="6081105" cy="1384995"/>
           </a:xfrm>
           <a:prstGeom prst="rect">
             <a:avLst/>
@@ -19985,7 +19985,7 @@
               <a:buChar char="•"/>
             </a:pPr>
             <a:r>
-              <a:rPr lang="ru-RU" altLang="ru-RU" sz="2800" dirty="0">
+              <a:rPr lang="ru-RU" altLang="ru-RU" sz="2800" dirty="0" smtClean="0">
                 <a:solidFill>
                   <a:schemeClr val="tx1"/>
                 </a:solidFill>
@@ -19993,6 +19993,33 @@
               </a:rPr>
               <a:t>3.9</a:t>
             </a:r>
+          </a:p>
+          <a:p>
+            <a:pPr marL="285750" indent="-285750" eaLnBrk="1" hangingPunct="1">
+              <a:spcBef>
+                <a:spcPct val="0"/>
+              </a:spcBef>
+              <a:buClr>
+                <a:schemeClr val="accent1"/>
+              </a:buClr>
+              <a:buFont typeface="Arial" panose="020B0604020202020204" pitchFamily="34" charset="0"/>
+              <a:buChar char="•"/>
+            </a:pPr>
+            <a:r>
+              <a:rPr lang="ru-RU" altLang="ru-RU" sz="2800" smtClean="0">
+                <a:solidFill>
+                  <a:schemeClr val="tx1"/>
+                </a:solidFill>
+                <a:latin typeface="+mn-lt"/>
+              </a:rPr>
+              <a:t>3.10</a:t>
+            </a:r>
+            <a:endParaRPr lang="ru-RU" altLang="ru-RU" sz="2800" dirty="0">
+              <a:solidFill>
+                <a:schemeClr val="tx1"/>
+              </a:solidFill>
+              <a:latin typeface="+mn-lt"/>
+            </a:endParaRPr>
           </a:p>
         </p:txBody>
       </p:sp>

--- a/Lectures/py_lec_8.pptx
+++ b/Lectures/py_lec_8.pptx
@@ -38,40 +38,33 @@
   <p:notesSz cx="6858000" cy="9144000"/>
   <p:embeddedFontLst>
     <p:embeddedFont>
-      <p:font typeface="Viga" panose="020B0604020202020204" charset="0"/>
+      <p:font typeface="Calibri" panose="020F0502020204030204" pitchFamily="34" charset="0"/>
       <p:regular r:id="rId28"/>
+      <p:bold r:id="rId29"/>
+      <p:italic r:id="rId30"/>
+      <p:boldItalic r:id="rId31"/>
     </p:embeddedFont>
     <p:embeddedFont>
-      <p:font typeface="Calibri" panose="020F0502020204030204" pitchFamily="34" charset="0"/>
-      <p:regular r:id="rId29"/>
-      <p:bold r:id="rId30"/>
-      <p:italic r:id="rId31"/>
-      <p:boldItalic r:id="rId32"/>
+      <p:font typeface="DM Sans" panose="020B0604020202020204" charset="0"/>
+      <p:regular r:id="rId32"/>
+      <p:bold r:id="rId33"/>
+      <p:italic r:id="rId34"/>
+      <p:boldItalic r:id="rId35"/>
     </p:embeddedFont>
     <p:embeddedFont>
       <p:font typeface="proxima nova bold" panose="02000506030000020004" charset="0"/>
-      <p:bold r:id="rId33"/>
-    </p:embeddedFont>
-    <p:embeddedFont>
-      <p:font typeface="Verdana" panose="020B0604030504040204" pitchFamily="34" charset="0"/>
-      <p:regular r:id="rId34"/>
-      <p:bold r:id="rId35"/>
-      <p:italic r:id="rId36"/>
-      <p:boldItalic r:id="rId37"/>
+      <p:bold r:id="rId36"/>
     </p:embeddedFont>
     <p:embeddedFont>
       <p:font typeface="proxima nova rg" panose="02000506030000020004" charset="0"/>
-      <p:regular r:id="rId38"/>
-      <p:bold r:id="rId39"/>
-      <p:italic r:id="rId40"/>
-      <p:boldItalic r:id="rId41"/>
+      <p:regular r:id="rId37"/>
+      <p:bold r:id="rId38"/>
+      <p:italic r:id="rId39"/>
+      <p:boldItalic r:id="rId40"/>
     </p:embeddedFont>
     <p:embeddedFont>
-      <p:font typeface="DM Sans" panose="020B0604020202020204" charset="0"/>
-      <p:regular r:id="rId42"/>
-      <p:bold r:id="rId43"/>
-      <p:italic r:id="rId44"/>
-      <p:boldItalic r:id="rId45"/>
+      <p:font typeface="Viga" panose="020B0604020202020204" charset="0"/>
+      <p:regular r:id="rId41"/>
     </p:embeddedFont>
   </p:embeddedFontLst>
   <p:defaultTextStyle>
@@ -14038,7 +14031,7 @@
                 </a:solidFill>
                 <a:latin typeface="Courier New" panose="02070309020205020404" pitchFamily="49" charset="0"/>
               </a:rPr>
-              <a:t>"I'm </a:t>
+              <a:t>f"I'm </a:t>
             </a:r>
             <a:r>
               <a:rPr lang="en-US" sz="1050" b="1" dirty="0">
@@ -19985,7 +19978,7 @@
               <a:buChar char="•"/>
             </a:pPr>
             <a:r>
-              <a:rPr lang="ru-RU" altLang="ru-RU" sz="2800" dirty="0" smtClean="0">
+              <a:rPr lang="ru-RU" altLang="ru-RU" sz="2800" dirty="0">
                 <a:solidFill>
                   <a:schemeClr val="tx1"/>
                 </a:solidFill>
@@ -20006,7 +19999,7 @@
               <a:buChar char="•"/>
             </a:pPr>
             <a:r>
-              <a:rPr lang="ru-RU" altLang="ru-RU" sz="2800" smtClean="0">
+              <a:rPr lang="ru-RU" altLang="ru-RU" sz="2800">
                 <a:solidFill>
                   <a:schemeClr val="tx1"/>
                 </a:solidFill>
@@ -25248,7 +25241,7 @@
               </a:rPr>
               <a:t>Доделать анализ кода Tasks/pep8task.py с учетом актуальных знаний и применением возможностей версий Python 3.8 и 3.9. </a:t>
             </a:r>
-            <a:endParaRPr lang="en-US" sz="1600" dirty="0" smtClean="0">
+            <a:endParaRPr lang="en-US" sz="1600" dirty="0">
               <a:solidFill>
                 <a:schemeClr val="bg1"/>
               </a:solidFill>
